--- a/source/_assets/ironman.pptx
+++ b/source/_assets/ironman.pptx
@@ -254,7 +254,7 @@
             <a:fld id="{3CDD3A71-4C75-488C-A8F3-A1F163ED0DB9}" type="datetimeFigureOut">
               <a:rPr lang="en-US" smtClean="0"/>
               <a:pPr/>
-              <a:t>10/25/2019</a:t>
+              <a:t>10/28/2019</a:t>
             </a:fld>
             <a:endParaRPr lang="en-US" dirty="0"/>
           </a:p>
@@ -422,7 +422,7 @@
             <a:fld id="{523CC419-8FB3-4D1C-8127-E63C1A13459D}" type="datetimeFigureOut">
               <a:rPr lang="en-US" smtClean="0"/>
               <a:pPr/>
-              <a:t>10/25/2019</a:t>
+              <a:t>10/28/2019</a:t>
             </a:fld>
             <a:endParaRPr lang="en-US" dirty="0"/>
           </a:p>
@@ -824,7 +824,7 @@
           <a:p>
             <a:fld id="{237FF733-248C-4CF7-A090-89CF012E357B}" type="datetimeFigureOut">
               <a:rPr lang="zh-TW" altLang="en-US" smtClean="0"/>
-              <a:t>2019/10/25</a:t>
+              <a:t>2019/10/28</a:t>
             </a:fld>
             <a:endParaRPr lang="zh-TW" altLang="en-US"/>
           </a:p>
@@ -995,7 +995,7 @@
           <a:p>
             <a:fld id="{237FF733-248C-4CF7-A090-89CF012E357B}" type="datetimeFigureOut">
               <a:rPr lang="zh-TW" altLang="en-US" smtClean="0"/>
-              <a:t>2019/10/25</a:t>
+              <a:t>2019/10/28</a:t>
             </a:fld>
             <a:endParaRPr lang="zh-TW" altLang="en-US"/>
           </a:p>
@@ -1176,7 +1176,7 @@
           <a:p>
             <a:fld id="{237FF733-248C-4CF7-A090-89CF012E357B}" type="datetimeFigureOut">
               <a:rPr lang="zh-TW" altLang="en-US" smtClean="0"/>
-              <a:t>2019/10/25</a:t>
+              <a:t>2019/10/28</a:t>
             </a:fld>
             <a:endParaRPr lang="zh-TW" altLang="en-US"/>
           </a:p>
@@ -1347,7 +1347,7 @@
           <a:p>
             <a:fld id="{237FF733-248C-4CF7-A090-89CF012E357B}" type="datetimeFigureOut">
               <a:rPr lang="zh-TW" altLang="en-US" smtClean="0"/>
-              <a:t>2019/10/25</a:t>
+              <a:t>2019/10/28</a:t>
             </a:fld>
             <a:endParaRPr lang="zh-TW" altLang="en-US"/>
           </a:p>
@@ -1594,7 +1594,7 @@
           <a:p>
             <a:fld id="{237FF733-248C-4CF7-A090-89CF012E357B}" type="datetimeFigureOut">
               <a:rPr lang="zh-TW" altLang="en-US" smtClean="0"/>
-              <a:t>2019/10/25</a:t>
+              <a:t>2019/10/28</a:t>
             </a:fld>
             <a:endParaRPr lang="zh-TW" altLang="en-US"/>
           </a:p>
@@ -1827,7 +1827,7 @@
           <a:p>
             <a:fld id="{237FF733-248C-4CF7-A090-89CF012E357B}" type="datetimeFigureOut">
               <a:rPr lang="zh-TW" altLang="en-US" smtClean="0"/>
-              <a:t>2019/10/25</a:t>
+              <a:t>2019/10/28</a:t>
             </a:fld>
             <a:endParaRPr lang="zh-TW" altLang="en-US"/>
           </a:p>
@@ -2195,7 +2195,7 @@
           <a:p>
             <a:fld id="{237FF733-248C-4CF7-A090-89CF012E357B}" type="datetimeFigureOut">
               <a:rPr lang="zh-TW" altLang="en-US" smtClean="0"/>
-              <a:t>2019/10/25</a:t>
+              <a:t>2019/10/28</a:t>
             </a:fld>
             <a:endParaRPr lang="zh-TW" altLang="en-US"/>
           </a:p>
@@ -2314,7 +2314,7 @@
           <a:p>
             <a:fld id="{237FF733-248C-4CF7-A090-89CF012E357B}" type="datetimeFigureOut">
               <a:rPr lang="zh-TW" altLang="en-US" smtClean="0"/>
-              <a:t>2019/10/25</a:t>
+              <a:t>2019/10/28</a:t>
             </a:fld>
             <a:endParaRPr lang="zh-TW" altLang="en-US"/>
           </a:p>
@@ -2410,7 +2410,7 @@
           <a:p>
             <a:fld id="{237FF733-248C-4CF7-A090-89CF012E357B}" type="datetimeFigureOut">
               <a:rPr lang="zh-TW" altLang="en-US" smtClean="0"/>
-              <a:t>2019/10/25</a:t>
+              <a:t>2019/10/28</a:t>
             </a:fld>
             <a:endParaRPr lang="zh-TW" altLang="en-US"/>
           </a:p>
@@ -2688,7 +2688,7 @@
           <a:p>
             <a:fld id="{237FF733-248C-4CF7-A090-89CF012E357B}" type="datetimeFigureOut">
               <a:rPr lang="zh-TW" altLang="en-US" smtClean="0"/>
-              <a:t>2019/10/25</a:t>
+              <a:t>2019/10/28</a:t>
             </a:fld>
             <a:endParaRPr lang="zh-TW" altLang="en-US"/>
           </a:p>
@@ -2946,7 +2946,7 @@
           <a:p>
             <a:fld id="{237FF733-248C-4CF7-A090-89CF012E357B}" type="datetimeFigureOut">
               <a:rPr lang="zh-TW" altLang="en-US" smtClean="0"/>
-              <a:t>2019/10/25</a:t>
+              <a:t>2019/10/28</a:t>
             </a:fld>
             <a:endParaRPr lang="zh-TW" altLang="en-US"/>
           </a:p>
@@ -3160,7 +3160,7 @@
           <a:p>
             <a:fld id="{237FF733-248C-4CF7-A090-89CF012E357B}" type="datetimeFigureOut">
               <a:rPr lang="zh-TW" altLang="en-US" smtClean="0"/>
-              <a:t>2019/10/25</a:t>
+              <a:t>2019/10/28</a:t>
             </a:fld>
             <a:endParaRPr lang="zh-TW" altLang="en-US"/>
           </a:p>
@@ -8075,7 +8075,7 @@
         </p:blipFill>
         <p:spPr>
           <a:xfrm>
-            <a:off x="4075649" y="3084501"/>
+            <a:off x="4206584" y="3090642"/>
             <a:ext cx="630000" cy="720000"/>
           </a:xfrm>
           <a:prstGeom prst="rect">
@@ -8529,8 +8529,8 @@
         </p:nvSpPr>
         <p:spPr>
           <a:xfrm>
-            <a:off x="3893398" y="3767358"/>
-            <a:ext cx="986489" cy="276999"/>
+            <a:off x="3794653" y="3767358"/>
+            <a:ext cx="1438857" cy="276999"/>
           </a:xfrm>
           <a:prstGeom prst="rect">
             <a:avLst/>
@@ -8541,7 +8541,7 @@
           </a:ln>
         </p:spPr>
         <p:txBody>
-          <a:bodyPr wrap="none">
+          <a:bodyPr wrap="square">
             <a:spAutoFit/>
           </a:bodyPr>
           <a:lstStyle/>
@@ -8551,7 +8551,7 @@
               <a:rPr lang="en-US" altLang="zh-TW" sz="1200" b="1" dirty="0">
                 <a:ea typeface="微軟正黑體" panose="020B0604030504040204" pitchFamily="34" charset="-120"/>
               </a:rPr>
-              <a:t>DI</a:t>
+              <a:t>Service</a:t>
             </a:r>
             <a:r>
               <a:rPr lang="zh-TW" altLang="en-US" sz="1200" b="1" dirty="0">
@@ -8563,7 +8563,7 @@
               <a:rPr lang="en-US" altLang="zh-TW" sz="1200" b="1" dirty="0">
                 <a:ea typeface="微軟正黑體" panose="020B0604030504040204" pitchFamily="34" charset="-120"/>
               </a:rPr>
-              <a:t>Container</a:t>
+              <a:t>Provider</a:t>
             </a:r>
             <a:endParaRPr lang="zh-TW" altLang="en-US" sz="1200" b="1" dirty="0">
               <a:ea typeface="微軟正黑體" panose="020B0604030504040204" pitchFamily="34" charset="-120"/>
@@ -8616,7 +8616,7 @@
         </p:nvCxnSpPr>
         <p:spPr>
           <a:xfrm flipV="1">
-            <a:off x="4705649" y="2167670"/>
+            <a:off x="4836584" y="2173811"/>
             <a:ext cx="527862" cy="1276831"/>
           </a:xfrm>
           <a:prstGeom prst="bentConnector3">
@@ -8653,7 +8653,7 @@
         </p:nvSpPr>
         <p:spPr>
           <a:xfrm>
-            <a:off x="4116966" y="2349086"/>
+            <a:off x="4044693" y="2716935"/>
             <a:ext cx="872355" cy="276999"/>
           </a:xfrm>
           <a:prstGeom prst="rect">
@@ -8739,7 +8739,7 @@
         </p:nvSpPr>
         <p:spPr>
           <a:xfrm>
-            <a:off x="3962400" y="2371367"/>
+            <a:off x="4851132" y="2698540"/>
             <a:ext cx="213212" cy="213212"/>
           </a:xfrm>
           <a:prstGeom prst="ellipse">
@@ -11444,8 +11444,8 @@
         </p:nvSpPr>
         <p:spPr>
           <a:xfrm>
-            <a:off x="6669452" y="956709"/>
-            <a:ext cx="1379352" cy="369332"/>
+            <a:off x="6492481" y="956709"/>
+            <a:ext cx="1733295" cy="369332"/>
           </a:xfrm>
           <a:prstGeom prst="rect">
             <a:avLst/>
@@ -11463,18 +11463,26 @@
           <a:p>
             <a:pPr algn="ctr"/>
             <a:r>
-              <a:rPr lang="en-US" altLang="zh-TW" b="1" dirty="0"/>
-              <a:t>DI</a:t>
-            </a:r>
-            <a:r>
-              <a:rPr lang="zh-TW" altLang="en-US" b="1" dirty="0"/>
+              <a:rPr lang="en-US" altLang="zh-TW" b="1" dirty="0">
+                <a:ea typeface="微軟正黑體" panose="020B0604030504040204" pitchFamily="34" charset="-120"/>
+              </a:rPr>
+              <a:t>Service</a:t>
+            </a:r>
+            <a:r>
+              <a:rPr lang="zh-TW" altLang="en-US" b="1" dirty="0">
+                <a:ea typeface="微軟正黑體" panose="020B0604030504040204" pitchFamily="34" charset="-120"/>
+              </a:rPr>
               <a:t> </a:t>
             </a:r>
             <a:r>
-              <a:rPr lang="en-US" altLang="zh-TW" b="1" dirty="0"/>
-              <a:t>Container</a:t>
-            </a:r>
-            <a:endParaRPr lang="zh-TW" altLang="en-US" b="1" dirty="0"/>
+              <a:rPr lang="en-US" altLang="zh-TW" b="1" dirty="0">
+                <a:ea typeface="微軟正黑體" panose="020B0604030504040204" pitchFamily="34" charset="-120"/>
+              </a:rPr>
+              <a:t>Provider</a:t>
+            </a:r>
+            <a:endParaRPr lang="zh-TW" altLang="en-US" b="1" dirty="0">
+              <a:ea typeface="微軟正黑體" panose="020B0604030504040204" pitchFamily="34" charset="-120"/>
+            </a:endParaRPr>
           </a:p>
         </p:txBody>
       </p:sp>
@@ -42218,12 +42226,6 @@
 </file>
 
 <file path=customXml/item1.xml><?xml version="1.0" encoding="utf-8"?>
-<p:properties xmlns:p="http://schemas.microsoft.com/office/2006/metadata/properties" xmlns:xsi="http://www.w3.org/2001/XMLSchema-instance">
-  <documentManagement/>
-</p:properties>
-</file>
-
-<file path=customXml/item2.xml><?xml version="1.0" encoding="utf-8"?>
 <ct:contentTypeSchema xmlns:ct="http://schemas.microsoft.com/office/2006/metadata/contentType" xmlns:ma="http://schemas.microsoft.com/office/2006/metadata/properties/metaAttributes" ct:_="" ma:_="" ma:contentTypeName="Document" ma:contentTypeID="0x0101000AA0115B54226D469CC0FAAE38E5F61C" ma:contentTypeVersion="3" ma:contentTypeDescription="Create a new document." ma:contentTypeScope="" ma:versionID="0ae424bb0065d3a2a055b165aca25ec5">
   <xsd:schema xmlns:xsd="http://www.w3.org/2001/XMLSchema" xmlns:p="http://schemas.microsoft.com/office/2006/metadata/properties" targetNamespace="http://schemas.microsoft.com/office/2006/metadata/properties" ma:root="true" ma:fieldsID="4aeb20c0e3442673af7ee10786458764">
     <xsd:element name="properties">
@@ -42272,6 +42274,12 @@
 </ct:contentTypeSchema>
 </file>
 
+<file path=customXml/item2.xml><?xml version="1.0" encoding="utf-8"?>
+<p:properties xmlns:p="http://schemas.microsoft.com/office/2006/metadata/properties" xmlns:xsi="http://www.w3.org/2001/XMLSchema-instance">
+  <documentManagement/>
+</p:properties>
+</file>
+
 <file path=customXml/item3.xml><?xml version="1.0" encoding="utf-8"?>
 <?mso-contentType ?>
 <FormTemplates xmlns="http://schemas.microsoft.com/sharepoint/v3/contenttype/forms">
@@ -42282,20 +42290,6 @@
 </file>
 
 <file path=customXml/itemProps1.xml><?xml version="1.0" encoding="utf-8"?>
-<ds:datastoreItem xmlns:ds="http://schemas.openxmlformats.org/officeDocument/2006/customXml" ds:itemID="{892A9AA9-F261-48C5-9DFB-0929A9F0E540}">
-  <ds:schemaRefs>
-    <ds:schemaRef ds:uri="http://purl.org/dc/elements/1.1/"/>
-    <ds:schemaRef ds:uri="http://schemas.microsoft.com/office/2006/documentManagement/types"/>
-    <ds:schemaRef ds:uri="http://purl.org/dc/terms/"/>
-    <ds:schemaRef ds:uri="http://schemas.openxmlformats.org/package/2006/metadata/core-properties"/>
-    <ds:schemaRef ds:uri="http://purl.org/dc/dcmitype/"/>
-    <ds:schemaRef ds:uri="http://schemas.microsoft.com/office/2006/metadata/properties"/>
-    <ds:schemaRef ds:uri="http://www.w3.org/XML/1998/namespace"/>
-  </ds:schemaRefs>
-</ds:datastoreItem>
-</file>
-
-<file path=customXml/itemProps2.xml><?xml version="1.0" encoding="utf-8"?>
 <ds:datastoreItem xmlns:ds="http://schemas.openxmlformats.org/officeDocument/2006/customXml" ds:itemID="{FE6BB287-9CB7-4AA6-A5A5-8D1CE03643F3}">
   <ds:schemaRefs>
     <ds:schemaRef ds:uri="http://schemas.microsoft.com/office/2006/metadata/contentType"/>
@@ -42310,6 +42304,20 @@
 </ds:datastoreItem>
 </file>
 
+<file path=customXml/itemProps2.xml><?xml version="1.0" encoding="utf-8"?>
+<ds:datastoreItem xmlns:ds="http://schemas.openxmlformats.org/officeDocument/2006/customXml" ds:itemID="{892A9AA9-F261-48C5-9DFB-0929A9F0E540}">
+  <ds:schemaRefs>
+    <ds:schemaRef ds:uri="http://purl.org/dc/elements/1.1/"/>
+    <ds:schemaRef ds:uri="http://schemas.microsoft.com/office/2006/documentManagement/types"/>
+    <ds:schemaRef ds:uri="http://purl.org/dc/terms/"/>
+    <ds:schemaRef ds:uri="http://schemas.openxmlformats.org/package/2006/metadata/core-properties"/>
+    <ds:schemaRef ds:uri="http://purl.org/dc/dcmitype/"/>
+    <ds:schemaRef ds:uri="http://schemas.microsoft.com/office/2006/metadata/properties"/>
+    <ds:schemaRef ds:uri="http://www.w3.org/XML/1998/namespace"/>
+  </ds:schemaRefs>
+</ds:datastoreItem>
+</file>
+
 <file path=customXml/itemProps3.xml><?xml version="1.0" encoding="utf-8"?>
 <ds:datastoreItem xmlns:ds="http://schemas.openxmlformats.org/officeDocument/2006/customXml" ds:itemID="{A1770BF7-49D5-46D6-8B76-1D8AF290B450}">
   <ds:schemaRefs>
